--- a/Miercoles-10/S01_Miercoles-10_1_Carrusel_Art-1141-contrato-valido_1x1.pptx
+++ b/Miercoles-10/S01_Miercoles-10_1_Carrusel_Art-1141-contrato-valido_1x1.pptx
@@ -3436,7 +3436,7 @@
           <a:p>
             <a:pPr algn="l">
               <a:lnSpc>
-                <a:spcPct val="110000"/>
+                <a:spcPct val="115000"/>
               </a:lnSpc>
             </a:pPr>
             <a:r>
@@ -3579,7 +3579,7 @@
           <a:p>
             <a:pPr algn="l">
               <a:lnSpc>
-                <a:spcPct val="110000"/>
+                <a:spcPct val="115000"/>
               </a:lnSpc>
             </a:pPr>
             <a:r>
@@ -3722,7 +3722,7 @@
           <a:p>
             <a:pPr algn="l">
               <a:lnSpc>
-                <a:spcPct val="110000"/>
+                <a:spcPct val="115000"/>
               </a:lnSpc>
             </a:pPr>
             <a:r>
@@ -3897,7 +3897,7 @@
         </p:nvSpPr>
         <p:spPr>
           <a:xfrm>
-            <a:off x="777240" y="1280160"/>
+            <a:off x="777240" y="1494536"/>
             <a:ext cx="1371600" cy="146304"/>
           </a:xfrm>
           <a:prstGeom prst="rect">
@@ -3941,8 +3941,8 @@
         </p:nvSpPr>
         <p:spPr>
           <a:xfrm>
-            <a:off x="777240" y="1737360"/>
-            <a:ext cx="6675120" cy="4483608"/>
+            <a:off x="777240" y="1951736"/>
+            <a:ext cx="6675120" cy="3594608"/>
           </a:xfrm>
           <a:prstGeom prst="rect">
             <a:avLst/>
@@ -3961,13 +3961,13 @@
               </a:lnSpc>
             </a:pPr>
             <a:r>
-              <a:rPr sz="8800" b="1">
+              <a:rPr sz="5200" b="1">
                 <a:solidFill>
                   <a:srgbClr val="FFFFFF"/>
                 </a:solidFill>
                 <a:latin typeface="Inter"/>
               </a:rPr>
-              <a:t>Artículo 1.141.</a:t>
+              <a:t>Tu contrato bien hecho, visado por un abogado.</a:t>
             </a:r>
           </a:p>
         </p:txBody>
@@ -3980,7 +3980,7 @@
         </p:nvSpPr>
         <p:spPr>
           <a:xfrm>
-            <a:off x="777240" y="5877052"/>
+            <a:off x="777240" y="5546344"/>
             <a:ext cx="6675120" cy="1118108"/>
           </a:xfrm>
           <a:prstGeom prst="rect">
@@ -4006,7 +4006,7 @@
                 </a:solidFill>
                 <a:latin typeface="Inter"/>
               </a:rPr>
-              <a:t>Guarda esta lámina.</a:t>
+              <a:t>notaly.com.ve · early access</a:t>
             </a:r>
           </a:p>
         </p:txBody>

--- a/Miercoles-10/S01_Miercoles-10_1_Carrusel_Art-1141-contrato-valido_1x1.pptx
+++ b/Miercoles-10/S01_Miercoles-10_1_Carrusel_Art-1141-contrato-valido_1x1.pptx
@@ -4006,7 +4006,7 @@
                 </a:solidFill>
                 <a:latin typeface="Inter"/>
               </a:rPr>
-              <a:t>notaly.com.ve · early access</a:t>
+              <a:t>Más en notaly.com.ve</a:t>
             </a:r>
           </a:p>
         </p:txBody>
